--- a/Lesson25-LongTermMemory/Lesson25-LongTermMemory.pptx
+++ b/Lesson25-LongTermMemory/Lesson25-LongTermMemory.pptx
@@ -1215,7 +1215,7 @@
           <a:p>
             <a:r>
               <a:rPr lang="en-US" dirty="0"/>
-              <a:t>Set OPENAI_API_KEY and run the project. The slide shows two separate launches, trimmed of the exit hint and blank lines. The inputs, replies and the saved fact's wording are illustrative. On the first run, the app loads zero facts. Introduce yourself, and after the reply you'll see a MEMORY MANAGER line confirming a new fact was saved. Note that the program prints AI followed directly by the reply, with no colon. Type exit, then launch the app again: it now reports one existing fact, and when you ask what it remembers, the answer draws on that fact from the previous session. Open user_memory.json in the output folder to see the facts array itself.</a:t>
+              <a:t>Set OPENAI_API_KEY and run the project. The slide shows two separate launches, trimmed of the exit hint and blank lines. The inputs, replies and the saved fact's wording are illustrative. On the first run, the app loads zero facts. Introduce yourself, and after the reply you'll see a MEMORY MANAGER line confirming a new fact was saved. Type exit, then launch the app again: it now reports one existing fact, and when you ask what it remembers, the answer draws on that fact from the previous session. Open user_memory.json in the output folder to see the facts array itself.</a:t>
             </a:r>
             <a:endParaRPr lang="en-US" dirty="0"/>
           </a:p>
@@ -8624,7 +8624,7 @@
                 <a:ea typeface="Courier New" pitchFamily="34" charset="-122"/>
                 <a:cs typeface="Courier New" pitchFamily="34" charset="-120"/>
               </a:rPr>
-              <a:t>AI Nice to meet you, Bob! What are you building?</a:t>
+              <a:t>AI: Nice to meet you, Bob! What are you building?</a:t>
             </a:r>
             <a:endParaRPr lang="en-US" sz="1100" dirty="0"/>
           </a:p>
@@ -8743,7 +8743,7 @@
                 <a:ea typeface="Courier New" pitchFamily="34" charset="-122"/>
                 <a:cs typeface="Courier New" pitchFamily="34" charset="-120"/>
               </a:rPr>
-              <a:t>AI You're Bob, and you write C# for a living.</a:t>
+              <a:t>AI: You're Bob, and you write C# for a living.</a:t>
             </a:r>
             <a:endParaRPr lang="en-US" sz="1100" dirty="0"/>
           </a:p>
